--- a/Presentations/Day-4-Claude-Code.pptx
+++ b/Presentations/Day-4-Claude-Code.pptx
@@ -412,46 +412,52 @@
           <a:lstStyle/>
           <a:p>
             <a:r>
+              <a:rPr dirty="0"/>
               <a:t>/LOOP IN ACTION — real use case, Day 3 (~1 min).</a:t>
             </a:r>
           </a:p>
           <a:p>
-            <a:endParaRPr/>
-          </a:p>
-          <a:p>
-            <a:r>
+            <a:endParaRPr dirty="0"/>
+          </a:p>
+          <a:p>
+            <a:r>
+              <a:rPr dirty="0"/>
               <a:t>Story beat: Day 3, the game runs but it's glitchy. Give /loop a crisp goal — "run 3 clean laps" — and let it grind.</a:t>
             </a:r>
           </a:p>
           <a:p>
-            <a:endParaRPr/>
-          </a:p>
-          <a:p>
-            <a:r>
+            <a:endParaRPr dirty="0"/>
+          </a:p>
+          <a:p>
+            <a:r>
+              <a:rPr dirty="0"/>
               <a:t>👉 Terminal walkthrough: Round 1 fixes a wall collision, Round 2 fixes stuck opponent AI, Round 3 hits 3 clean laps → stops. "The race finally races."</a:t>
             </a:r>
           </a:p>
           <a:p>
-            <a:endParaRPr/>
-          </a:p>
-          <a:p>
-            <a:r>
+            <a:endParaRPr dirty="0"/>
+          </a:p>
+          <a:p>
+            <a:r>
+              <a:rPr dirty="0"/>
               <a:t>Callback: point out we've now used all three commands on ONE project — plan it (Day 1), automate tests (Day 2), loop to polish (Day 3). That was the promise on the overview slide.</a:t>
             </a:r>
           </a:p>
           <a:p>
-            <a:endParaRPr/>
-          </a:p>
-          <a:p>
-            <a:r>
+            <a:endParaRPr dirty="0"/>
+          </a:p>
+          <a:p>
+            <a:r>
+              <a:rPr dirty="0"/>
               <a:t>Natural pause point — good spot to take questions before moving to the "power features" half.</a:t>
             </a:r>
           </a:p>
           <a:p>
-            <a:endParaRPr/>
-          </a:p>
-          <a:p>
-            <a:r>
+            <a:endParaRPr dirty="0"/>
+          </a:p>
+          <a:p>
+            <a:r>
+              <a:rPr dirty="0"/>
               <a:t>→ Next: leveling up.</a:t>
             </a:r>
           </a:p>
@@ -522,67 +528,93 @@
           <a:lstStyle/>
           <a:p>
             <a:r>
+              <a:rPr dirty="0"/>
               <a:t>LEVEL UP — power features overview (~1.5 min).</a:t>
             </a:r>
           </a:p>
           <a:p>
-            <a:endParaRPr/>
-          </a:p>
-          <a:p>
-            <a:r>
+            <a:endParaRPr dirty="0"/>
+          </a:p>
+          <a:p>
+            <a:r>
+              <a:rPr dirty="0"/>
               <a:t>Transition line: "Once the basics feel comfortable, these give Claude lasting memory of how you and your project work."</a:t>
             </a:r>
           </a:p>
           <a:p>
-            <a:endParaRPr/>
-          </a:p>
-          <a:p>
-            <a:r>
+            <a:endParaRPr dirty="0"/>
+          </a:p>
+          <a:p>
+            <a:r>
+              <a:rPr dirty="0"/>
               <a:t>This is a preview grid — don't go deep, just name the four and note that the next slides cover the big ones:</a:t>
             </a:r>
           </a:p>
           <a:p>
             <a:r>
-              <a:t>• CLAUDE.md — a file Claude reads every session (project memory).</a:t>
-            </a:r>
-          </a:p>
-          <a:p>
-            <a:r>
+              <a:rPr dirty="0"/>
+              <a:t>• </a:t>
+            </a:r>
+            <a:r>
+              <a:rPr dirty="0" err="1"/>
+              <a:t>CLAUDE.md</a:t>
+            </a:r>
+            <a:r>
+              <a:rPr dirty="0"/>
+              <a:t> — a file Claude reads every session (project memory).</a:t>
+            </a:r>
+          </a:p>
+          <a:p>
+            <a:r>
+              <a:rPr dirty="0"/>
               <a:t>• Memory (#) — start a line with # to save a fact instantly.</a:t>
             </a:r>
           </a:p>
           <a:p>
             <a:r>
+              <a:rPr dirty="0"/>
               <a:t>• Custom commands — save prompt recipes as your own /commands.</a:t>
             </a:r>
           </a:p>
           <a:p>
             <a:r>
+              <a:rPr dirty="0"/>
               <a:t>• MCP connectors — wire Claude into GitHub, databases, and other tools.</a:t>
             </a:r>
           </a:p>
           <a:p>
-            <a:endParaRPr/>
-          </a:p>
-          <a:p>
-            <a:r>
+            <a:endParaRPr dirty="0"/>
+          </a:p>
+          <a:p>
+            <a:r>
+              <a:rPr dirty="0"/>
               <a:t>👉 Point at "// project memory that persists" — that phrase is the theme of the next few slides.</a:t>
             </a:r>
           </a:p>
           <a:p>
-            <a:endParaRPr/>
-          </a:p>
-          <a:p>
-            <a:r>
+            <a:endParaRPr dirty="0"/>
+          </a:p>
+          <a:p>
+            <a:r>
+              <a:rPr dirty="0"/>
               <a:t>Audience note: this half is more advanced. Tell students it's fine if it's aspirational — bookmark it for when they're building bigger things.</a:t>
             </a:r>
           </a:p>
           <a:p>
-            <a:endParaRPr/>
-          </a:p>
-          <a:p>
-            <a:r>
-              <a:t>→ Next: CLAUDE.md.</a:t>
+            <a:endParaRPr dirty="0"/>
+          </a:p>
+          <a:p>
+            <a:r>
+              <a:rPr dirty="0"/>
+              <a:t>→ Next: </a:t>
+            </a:r>
+            <a:r>
+              <a:rPr dirty="0" err="1"/>
+              <a:t>CLAUDE.md</a:t>
+            </a:r>
+            <a:r>
+              <a:rPr dirty="0"/>
+              <a:t>.</a:t>
             </a:r>
           </a:p>
         </p:txBody>
@@ -1500,53 +1532,61 @@
           <a:lstStyle/>
           <a:p>
             <a:r>
+              <a:rPr dirty="0"/>
               <a:t>WHAT IS IT — the one-sentence definition (~1.5 min).</a:t>
             </a:r>
           </a:p>
           <a:p>
-            <a:endParaRPr/>
-          </a:p>
-          <a:p>
-            <a:r>
+            <a:endParaRPr dirty="0"/>
+          </a:p>
+          <a:p>
+            <a:r>
+              <a:rPr dirty="0"/>
               <a:t>Core line: "It's a coding partner you talk to in plain English." Repeat this — it's the single idea you want them to leave with.</a:t>
             </a:r>
           </a:p>
           <a:p>
-            <a:endParaRPr/>
-          </a:p>
-          <a:p>
-            <a:r>
+            <a:endParaRPr dirty="0"/>
+          </a:p>
+          <a:p>
+            <a:r>
+              <a:rPr dirty="0"/>
               <a:t>Walk the three numbered points:</a:t>
             </a:r>
           </a:p>
           <a:p>
             <a:r>
+              <a:rPr dirty="0"/>
               <a:t>• 01 Talk, don't memorize — contrast with the myth that coding means memorizing cryptic commands. You don't.</a:t>
             </a:r>
           </a:p>
           <a:p>
             <a:r>
+              <a:rPr dirty="0"/>
               <a:t>• 02 It does the work — it reads files, writes real (not fake) code, runs it, and fixes its OWN mistakes. Emphasize "fixes its own mistakes" — that surprises people.</a:t>
             </a:r>
           </a:p>
           <a:p>
             <a:r>
+              <a:rPr dirty="0"/>
               <a:t>• 03 Learns with you — it explains each step, so you understand, not just copy.</a:t>
             </a:r>
           </a:p>
           <a:p>
-            <a:endParaRPr/>
-          </a:p>
-          <a:p>
-            <a:r>
+            <a:endParaRPr dirty="0"/>
+          </a:p>
+          <a:p>
+            <a:r>
+              <a:rPr dirty="0"/>
               <a:t>👉 Point at each number as you go so the room tracks the three-beat structure.</a:t>
             </a:r>
           </a:p>
           <a:p>
-            <a:endParaRPr/>
-          </a:p>
-          <a:p>
-            <a:r>
+            <a:endParaRPr dirty="0"/>
+          </a:p>
+          <a:p>
+            <a:r>
+              <a:rPr dirty="0"/>
               <a:t>→ Next: the fun part — what you can actually make.</a:t>
             </a:r>
           </a:p>
@@ -1975,54 +2015,61 @@
           <a:lstStyle/>
           <a:p>
             <a:r>
+              <a:rPr dirty="0"/>
               <a:t>/PLAN IN ACTION — real use case, Day 1 (~1 min).</a:t>
             </a:r>
           </a:p>
           <a:p>
-            <a:endParaRPr/>
-          </a:p>
-          <a:p>
-            <a:r>
+            <a:endParaRPr dirty="0"/>
+          </a:p>
+          <a:p>
+            <a:r>
+              <a:rPr dirty="0"/>
               <a:t>This is the payoff for the previous slide — same idea, concrete project.</a:t>
             </a:r>
           </a:p>
           <a:p>
-            <a:endParaRPr/>
-          </a:p>
-          <a:p>
-            <a:r>
+            <a:endParaRPr dirty="0"/>
+          </a:p>
+          <a:p>
+            <a:r>
+              <a:rPr dirty="0"/>
               <a:t>Narrate the 3 steps: (1) describe the goal → (2) review/tweak the steps → (3) say "go."</a:t>
             </a:r>
           </a:p>
           <a:p>
-            <a:endParaRPr/>
-          </a:p>
-          <a:p>
-            <a:r>
+            <a:endParaRPr dirty="0"/>
+          </a:p>
+          <a:p>
+            <a:r>
+              <a:rPr dirty="0"/>
               <a:t>👉 Point at the terminal: the student adds "engine sounds as step 5" BEFORE any code exists. That's the whole point — you shape the plan cheaply first.</a:t>
             </a:r>
           </a:p>
           <a:p>
-            <a:endParaRPr/>
-          </a:p>
-          <a:p>
-            <a:r>
+            <a:endParaRPr dirty="0"/>
+          </a:p>
+          <a:p>
+            <a:r>
+              <a:rPr dirty="0"/>
               <a:t>Repeat the takeaway on screen: "You stay in control — nothing gets built until the plan looks right to you."</a:t>
             </a:r>
           </a:p>
           <a:p>
-            <a:endParaRPr/>
-          </a:p>
-          <a:p>
-            <a:r>
+            <a:endParaRPr dirty="0"/>
+          </a:p>
+          <a:p>
+            <a:r>
+              <a:rPr dirty="0"/>
               <a:t>Pace note: this "in action" slide can go quickly since it mirrors the concept slide before it. Same pattern repeats for /workflow and /loop.</a:t>
             </a:r>
           </a:p>
           <a:p>
-            <a:endParaRPr/>
-          </a:p>
-          <a:p>
-            <a:r>
+            <a:endParaRPr dirty="0"/>
+          </a:p>
+          <a:p>
+            <a:r>
+              <a:rPr dirty="0"/>
               <a:t>→ Next: /workflow.</a:t>
             </a:r>
           </a:p>
@@ -2525,7 +2572,7 @@
           <a:p>
             <a:fld id="{37A2730A-859E-B540-ADF3-E97069AD1FDB}" type="datetimeFigureOut">
               <a:rPr lang="en-US" smtClean="0"/>
-              <a:t>7/5/26</a:t>
+              <a:t>7/9/26</a:t>
             </a:fld>
             <a:endParaRPr lang="en-US"/>
           </a:p>
@@ -2723,7 +2770,7 @@
           <a:p>
             <a:fld id="{37A2730A-859E-B540-ADF3-E97069AD1FDB}" type="datetimeFigureOut">
               <a:rPr lang="en-US" smtClean="0"/>
-              <a:t>7/5/26</a:t>
+              <a:t>7/9/26</a:t>
             </a:fld>
             <a:endParaRPr lang="en-US"/>
           </a:p>
@@ -2931,7 +2978,7 @@
           <a:p>
             <a:fld id="{37A2730A-859E-B540-ADF3-E97069AD1FDB}" type="datetimeFigureOut">
               <a:rPr lang="en-US" smtClean="0"/>
-              <a:t>7/5/26</a:t>
+              <a:t>7/9/26</a:t>
             </a:fld>
             <a:endParaRPr lang="en-US"/>
           </a:p>
@@ -3129,7 +3176,7 @@
           <a:p>
             <a:fld id="{37A2730A-859E-B540-ADF3-E97069AD1FDB}" type="datetimeFigureOut">
               <a:rPr lang="en-US" smtClean="0"/>
-              <a:t>7/5/26</a:t>
+              <a:t>7/9/26</a:t>
             </a:fld>
             <a:endParaRPr lang="en-US"/>
           </a:p>
@@ -3404,7 +3451,7 @@
           <a:p>
             <a:fld id="{37A2730A-859E-B540-ADF3-E97069AD1FDB}" type="datetimeFigureOut">
               <a:rPr lang="en-US" smtClean="0"/>
-              <a:t>7/5/26</a:t>
+              <a:t>7/9/26</a:t>
             </a:fld>
             <a:endParaRPr lang="en-US"/>
           </a:p>
@@ -3669,7 +3716,7 @@
           <a:p>
             <a:fld id="{37A2730A-859E-B540-ADF3-E97069AD1FDB}" type="datetimeFigureOut">
               <a:rPr lang="en-US" smtClean="0"/>
-              <a:t>7/5/26</a:t>
+              <a:t>7/9/26</a:t>
             </a:fld>
             <a:endParaRPr lang="en-US"/>
           </a:p>
@@ -4081,7 +4128,7 @@
           <a:p>
             <a:fld id="{37A2730A-859E-B540-ADF3-E97069AD1FDB}" type="datetimeFigureOut">
               <a:rPr lang="en-US" smtClean="0"/>
-              <a:t>7/5/26</a:t>
+              <a:t>7/9/26</a:t>
             </a:fld>
             <a:endParaRPr lang="en-US"/>
           </a:p>
@@ -4222,7 +4269,7 @@
           <a:p>
             <a:fld id="{37A2730A-859E-B540-ADF3-E97069AD1FDB}" type="datetimeFigureOut">
               <a:rPr lang="en-US" smtClean="0"/>
-              <a:t>7/5/26</a:t>
+              <a:t>7/9/26</a:t>
             </a:fld>
             <a:endParaRPr lang="en-US"/>
           </a:p>
@@ -4335,7 +4382,7 @@
           <a:p>
             <a:fld id="{37A2730A-859E-B540-ADF3-E97069AD1FDB}" type="datetimeFigureOut">
               <a:rPr lang="en-US" smtClean="0"/>
-              <a:t>7/5/26</a:t>
+              <a:t>7/9/26</a:t>
             </a:fld>
             <a:endParaRPr lang="en-US"/>
           </a:p>
@@ -4646,7 +4693,7 @@
           <a:p>
             <a:fld id="{37A2730A-859E-B540-ADF3-E97069AD1FDB}" type="datetimeFigureOut">
               <a:rPr lang="en-US" smtClean="0"/>
-              <a:t>7/5/26</a:t>
+              <a:t>7/9/26</a:t>
             </a:fld>
             <a:endParaRPr lang="en-US"/>
           </a:p>
@@ -4934,7 +4981,7 @@
           <a:p>
             <a:fld id="{37A2730A-859E-B540-ADF3-E97069AD1FDB}" type="datetimeFigureOut">
               <a:rPr lang="en-US" smtClean="0"/>
-              <a:t>7/5/26</a:t>
+              <a:t>7/9/26</a:t>
             </a:fld>
             <a:endParaRPr lang="en-US"/>
           </a:p>
@@ -5175,7 +5222,7 @@
           <a:p>
             <a:fld id="{37A2730A-859E-B540-ADF3-E97069AD1FDB}" type="datetimeFigureOut">
               <a:rPr lang="en-US" smtClean="0"/>
-              <a:t>7/5/26</a:t>
+              <a:t>7/9/26</a:t>
             </a:fld>
             <a:endParaRPr lang="en-US"/>
           </a:p>
@@ -5606,7 +5653,7 @@
         </p:nvSpPr>
         <p:spPr>
           <a:xfrm>
-            <a:off x="0" y="50400"/>
+            <a:off x="0" y="62592"/>
             <a:ext cx="12192000" cy="6858000"/>
           </a:xfrm>
           <a:prstGeom prst="rect">
@@ -8553,8 +8600,8 @@
         </p:nvSpPr>
         <p:spPr>
           <a:xfrm>
-            <a:off x="6756400" y="4826000"/>
-            <a:ext cx="4775200" cy="355600"/>
+            <a:off x="6350000" y="4800600"/>
+            <a:ext cx="5888854" cy="355600"/>
           </a:xfrm>
           <a:prstGeom prst="rect">
             <a:avLst/>
@@ -8569,14 +8616,14 @@
           <a:p>
             <a:pPr algn="l"/>
             <a:r>
-              <a:rPr lang="en-US" sz="1900" b="1">
+              <a:rPr lang="en-US" sz="1900" b="1" dirty="0">
                 <a:solidFill>
                   <a:srgbClr val="D97757"/>
                 </a:solidFill>
                 <a:latin typeface="Consolas"/>
                 <a:cs typeface="Consolas"/>
               </a:rPr>
-              <a:t>MCP connectors</a:t>
+              <a:t>MCP (Model. Context Protocol) connectors</a:t>
             </a:r>
           </a:p>
         </p:txBody>
@@ -8611,7 +8658,7 @@
           <a:p>
             <a:pPr algn="l"/>
             <a:r>
-              <a:rPr lang="en-US" sz="1400">
+              <a:rPr lang="en-US" sz="1400" dirty="0">
                 <a:solidFill>
                   <a:srgbClr val="C9CDD3"/>
                 </a:solidFill>
@@ -18756,10 +18803,10 @@
           <p:nvPr/>
         </p:nvPicPr>
         <p:blipFill>
-          <a:blip r:embed="rId3">
+          <a:blip>
             <a:extLst>
               <a:ext uri="{96DAC541-7B7A-43D3-8B79-37D633B846F1}">
-                <asvg:svgBlip xmlns:asvg="http://schemas.microsoft.com/office/drawing/2016/SVG/main" r:embed="rId4"/>
+                <asvg:svgBlip xmlns:asvg="http://schemas.microsoft.com/office/drawing/2016/SVG/main" r:embed="rId3"/>
               </a:ext>
             </a:extLst>
           </a:blip>
@@ -18786,10 +18833,10 @@
           <p:nvPr/>
         </p:nvPicPr>
         <p:blipFill>
-          <a:blip r:embed="rId5">
+          <a:blip>
             <a:extLst>
               <a:ext uri="{96DAC541-7B7A-43D3-8B79-37D633B846F1}">
-                <asvg:svgBlip xmlns:asvg="http://schemas.microsoft.com/office/drawing/2016/SVG/main" r:embed="rId6"/>
+                <asvg:svgBlip xmlns:asvg="http://schemas.microsoft.com/office/drawing/2016/SVG/main" r:embed="rId4"/>
               </a:ext>
             </a:extLst>
           </a:blip>
@@ -18816,10 +18863,10 @@
           <p:nvPr/>
         </p:nvPicPr>
         <p:blipFill>
-          <a:blip r:embed="rId7">
+          <a:blip>
             <a:extLst>
               <a:ext uri="{96DAC541-7B7A-43D3-8B79-37D633B846F1}">
-                <asvg:svgBlip xmlns:asvg="http://schemas.microsoft.com/office/drawing/2016/SVG/main" r:embed="rId8"/>
+                <asvg:svgBlip xmlns:asvg="http://schemas.microsoft.com/office/drawing/2016/SVG/main" r:embed="rId5"/>
               </a:ext>
             </a:extLst>
           </a:blip>
@@ -18846,10 +18893,10 @@
           <p:nvPr/>
         </p:nvPicPr>
         <p:blipFill>
-          <a:blip r:embed="rId9">
+          <a:blip>
             <a:extLst>
               <a:ext uri="{96DAC541-7B7A-43D3-8B79-37D633B846F1}">
-                <asvg:svgBlip xmlns:asvg="http://schemas.microsoft.com/office/drawing/2016/SVG/main" r:embed="rId10"/>
+                <asvg:svgBlip xmlns:asvg="http://schemas.microsoft.com/office/drawing/2016/SVG/main" r:embed="rId6"/>
               </a:ext>
             </a:extLst>
           </a:blip>
@@ -26182,7 +26229,7 @@
 
 <file path=ppt/webextensions/taskpanes.xml><?xml version="1.0" encoding="utf-8"?>
 <wetp:taskpanes xmlns:wetp="http://schemas.microsoft.com/office/webextensions/taskpanes/2010/11">
-  <wetp:taskpane dockstate="right" visibility="1" width="350" row="1">
+  <wetp:taskpane dockstate="right" visibility="0" width="350" row="1">
     <wetp:webextensionref xmlns:r="http://schemas.openxmlformats.org/officeDocument/2006/relationships" r:id="rId1"/>
   </wetp:taskpane>
 </wetp:taskpanes>
@@ -26446,21 +26493,21 @@
 </file>
 
 <file path=customXml/item2.xml><?xml version="1.0" encoding="utf-8"?>
+<p:properties xmlns:p="http://schemas.microsoft.com/office/2006/metadata/properties" xmlns:xsi="http://www.w3.org/2001/XMLSchema-instance" xmlns:pc="http://schemas.microsoft.com/office/infopath/2007/PartnerControls">
+  <documentManagement>
+    <Document_x0020_Purpose xmlns="f577acbf-5b0b-4b4f-9948-268e97f8d3a4">Informational</Document_x0020_Purpose>
+    <Initiatives xmlns="f577acbf-5b0b-4b4f-9948-268e97f8d3a4"/>
+  </documentManagement>
+</p:properties>
+</file>
+
+<file path=customXml/item3.xml><?xml version="1.0" encoding="utf-8"?>
 <?mso-contentType ?>
 <FormTemplates xmlns="http://schemas.microsoft.com/sharepoint/v3/contenttype/forms">
   <Display>DocumentLibraryForm</Display>
   <Edit>DocumentLibraryForm</Edit>
   <New>DocumentLibraryForm</New>
 </FormTemplates>
-</file>
-
-<file path=customXml/item3.xml><?xml version="1.0" encoding="utf-8"?>
-<p:properties xmlns:p="http://schemas.microsoft.com/office/2006/metadata/properties" xmlns:xsi="http://www.w3.org/2001/XMLSchema-instance" xmlns:pc="http://schemas.microsoft.com/office/infopath/2007/PartnerControls">
-  <documentManagement>
-    <Document_x0020_Purpose xmlns="f577acbf-5b0b-4b4f-9948-268e97f8d3a4">Informational</Document_x0020_Purpose>
-    <Initiatives xmlns="f577acbf-5b0b-4b4f-9948-268e97f8d3a4"/>
-  </documentManagement>
-</p:properties>
 </file>
 
 <file path=customXml/itemProps1.xml><?xml version="1.0" encoding="utf-8"?>
@@ -26483,14 +26530,6 @@
 </file>
 
 <file path=customXml/itemProps2.xml><?xml version="1.0" encoding="utf-8"?>
-<ds:datastoreItem xmlns:ds="http://schemas.openxmlformats.org/officeDocument/2006/customXml" ds:itemID="{E21AFCC0-734A-4A90-A597-A1CB34860DCD}">
-  <ds:schemaRefs>
-    <ds:schemaRef ds:uri="http://schemas.microsoft.com/sharepoint/v3/contenttype/forms"/>
-  </ds:schemaRefs>
-</ds:datastoreItem>
-</file>
-
-<file path=customXml/itemProps3.xml><?xml version="1.0" encoding="utf-8"?>
 <ds:datastoreItem xmlns:ds="http://schemas.openxmlformats.org/officeDocument/2006/customXml" ds:itemID="{617AB1FA-2F28-4684-9230-02ACEB6C0B0A}">
   <ds:schemaRefs>
     <ds:schemaRef ds:uri="b1e4d6ee-9f6f-43f8-a618-24f3d84da28f"/>
@@ -26505,4 +26544,12 @@
     <ds:schemaRef ds:uri="http://purl.org/dc/dcmitype/"/>
   </ds:schemaRefs>
 </ds:datastoreItem>
+</file>
+
+<file path=customXml/itemProps3.xml><?xml version="1.0" encoding="utf-8"?>
+<ds:datastoreItem xmlns:ds="http://schemas.openxmlformats.org/officeDocument/2006/customXml" ds:itemID="{E21AFCC0-734A-4A90-A597-A1CB34860DCD}">
+  <ds:schemaRefs>
+    <ds:schemaRef ds:uri="http://schemas.microsoft.com/sharepoint/v3/contenttype/forms"/>
+  </ds:schemaRefs>
+</ds:datastoreItem>
 </file>